--- a/content/decks/2026-07-31-durable-agents-crash-lab.pptx
+++ b/content/decks/2026-07-31-durable-agents-crash-lab.pptx
@@ -6104,7 +6104,7 @@
                 <a:ea typeface="Arial" pitchFamily="34" charset="-122"/>
                 <a:cs typeface="Arial" pitchFamily="34" charset="-120"/>
               </a:rPr>
-              <a:t>Fair path: retries, checkpoints, approval — still re-pays</a:t>
+              <a:t>Fair path: retries, checkpoints, approval; still re-pays</a:t>
             </a:r>
             <a:endParaRPr lang="en-US" sz="1500" dirty="0"/>
           </a:p>
